--- a/Chest X-Ray Classifier COVID-19 Pneumonia & Normal Detection/Slides/Chest X-Ray Classifier.pptx
+++ b/Chest X-Ray Classifier COVID-19 Pneumonia & Normal Detection/Slides/Chest X-Ray Classifier.pptx
@@ -4,6 +4,9 @@
   <p:sldMasterIdLst>
     <p:sldMasterId id="2147483648" r:id="rId1"/>
   </p:sldMasterIdLst>
+  <p:notesMasterIdLst>
+    <p:notesMasterId r:id="rId29"/>
+  </p:notesMasterIdLst>
   <p:sldIdLst>
     <p:sldId id="256" r:id="rId2"/>
     <p:sldId id="257" r:id="rId3"/>
@@ -33,10 +36,7 @@
     <p:sldId id="281" r:id="rId27"/>
     <p:sldId id="282" r:id="rId28"/>
   </p:sldIdLst>
-  <p:notesMasterIdLst>
-    <p:notesMasterId r:id="rId29"/>
-  </p:notesMasterIdLst>
-  <p:sldSz cx="9144000" cy="5143500"/>
+  <p:sldSz cx="9144000" cy="5143500" type="screen16x9"/>
   <p:notesSz cx="5143500" cy="9144000"/>
   <p:defaultTextStyle>
     <a:lvl1pPr marL="0" algn="l" defTabSz="914400" rtl="0" eaLnBrk="1" latinLnBrk="0" hangingPunct="1">
@@ -130,6 +130,11 @@
       </a:defRPr>
     </a:lvl9pPr>
   </p:defaultTextStyle>
+  <p:extLst>
+    <p:ext uri="{EFAFB233-063F-42B5-8137-9DF3F51BA10A}">
+      <p15:sldGuideLst xmlns:p15="http://schemas.microsoft.com/office/powerpoint/2012/main"/>
+    </p:ext>
+  </p:extLst>
 </p:presentation>
 </file>
 
@@ -155,234 +160,10 @@
           <a:chExt cx="0" cy="0"/>
         </a:xfrm>
       </p:grpSpPr>
-      <p:sp>
-        <p:nvSpPr>
-          <p:cNvPr id="2" name="Header Placeholder 1"/>
-          <p:cNvSpPr>
-            <a:spLocks noGrp="1"/>
-          </p:cNvSpPr>
-          <p:nvPr>
-            <p:ph type="hdr" sz="quarter"/>
-          </p:nvPr>
-        </p:nvSpPr>
-        <p:spPr>
-          <a:xfrm>
-            <a:off x="0" y="0"/>
-            <a:ext cx="2971800" cy="458788"/>
-          </a:xfrm>
-          <a:prstGeom prst="rect">
-            <a:avLst/>
-          </a:prstGeom>
-        </p:spPr>
-        <p:txBody>
-          <a:bodyPr vert="horz" lIns="91440" tIns="45720" rIns="91440" bIns="45720" rtlCol="0"/>
-          <a:lstStyle>
-            <a:lvl1pPr algn="l">
-              <a:defRPr sz="1200"/>
-            </a:lvl1pPr>
-          </a:lstStyle>
-          <a:p>
-            <a:endParaRPr lang="en-US"/>
-          </a:p>
-        </p:txBody>
-      </p:sp>
-      <p:sp>
-        <p:nvSpPr>
-          <p:cNvPr id="3" name="Date Placeholder 2"/>
-          <p:cNvSpPr>
-            <a:spLocks noGrp="1"/>
-          </p:cNvSpPr>
-          <p:nvPr>
-            <p:ph type="dt" idx="1"/>
-          </p:nvPr>
-        </p:nvSpPr>
-        <p:spPr>
-          <a:xfrm>
-            <a:off x="3884613" y="0"/>
-            <a:ext cx="2971800" cy="458788"/>
-          </a:xfrm>
-          <a:prstGeom prst="rect">
-            <a:avLst/>
-          </a:prstGeom>
-        </p:spPr>
-        <p:txBody>
-          <a:bodyPr vert="horz" lIns="91440" tIns="45720" rIns="91440" bIns="45720" rtlCol="0"/>
-          <a:lstStyle>
-            <a:lvl1pPr algn="r">
-              <a:defRPr sz="1200"/>
-            </a:lvl1pPr>
-          </a:lstStyle>
-          <a:p>
-            <a:fld id="{5282F153-3F37-0F45-9E97-73ACFA13230C}" type="datetimeFigureOut">
-              <a:rPr lang="en-US"/>
-              <a:t>7/23/19</a:t>
-            </a:fld>
-            <a:endParaRPr lang="en-US"/>
-          </a:p>
-        </p:txBody>
-      </p:sp>
-      <p:sp>
-        <p:nvSpPr>
-          <p:cNvPr id="4" name="Slide Image Placeholder 3"/>
-          <p:cNvSpPr>
-            <a:spLocks noGrp="1" noRot="1" noChangeAspect="1"/>
-          </p:cNvSpPr>
-          <p:nvPr>
-            <p:ph type="sldImg" idx="2"/>
-          </p:nvPr>
-        </p:nvSpPr>
-        <p:spPr>
-          <a:xfrm>
-            <a:off x="685800" y="1143000"/>
-            <a:ext cx="5486400" cy="3086100"/>
-          </a:xfrm>
-          <a:prstGeom prst="rect">
-            <a:avLst/>
-          </a:prstGeom>
-          <a:noFill/>
-          <a:ln w="12700">
-            <a:solidFill>
-              <a:prstClr val="black"/>
-            </a:solidFill>
-          </a:ln>
-        </p:spPr>
-        <p:txBody>
-          <a:bodyPr vert="horz" lIns="91440" tIns="45720" rIns="91440" bIns="45720" rtlCol="0" anchor="ctr"/>
-          <a:lstStyle/>
-          <a:p>
-            <a:endParaRPr lang="en-US"/>
-          </a:p>
-        </p:txBody>
-      </p:sp>
-      <p:sp>
-        <p:nvSpPr>
-          <p:cNvPr id="5" name="Notes Placeholder 4"/>
-          <p:cNvSpPr>
-            <a:spLocks noGrp="1"/>
-          </p:cNvSpPr>
-          <p:nvPr>
-            <p:ph type="body" sz="quarter" idx="3"/>
-          </p:nvPr>
-        </p:nvSpPr>
-        <p:spPr>
-          <a:xfrm>
-            <a:off x="685800" y="4400550"/>
-            <a:ext cx="5486400" cy="3600450"/>
-          </a:xfrm>
-          <a:prstGeom prst="rect">
-            <a:avLst/>
-          </a:prstGeom>
-        </p:spPr>
-        <p:txBody>
-          <a:bodyPr vert="horz" lIns="91440" tIns="45720" rIns="91440" bIns="45720" rtlCol="0"/>
-          <a:lstStyle/>
-          <a:p>
-            <a:pPr lvl="0"/>
-            <a:r>
-              <a:rPr lang="en-US"/>
-              <a:t>Click to edit Master text styles</a:t>
-            </a:r>
-          </a:p>
-          <a:p>
-            <a:pPr lvl="1"/>
-            <a:r>
-              <a:rPr lang="en-US"/>
-              <a:t>Second level</a:t>
-            </a:r>
-          </a:p>
-          <a:p>
-            <a:pPr lvl="2"/>
-            <a:r>
-              <a:rPr lang="en-US"/>
-              <a:t>Third level</a:t>
-            </a:r>
-          </a:p>
-          <a:p>
-            <a:pPr lvl="3"/>
-            <a:r>
-              <a:rPr lang="en-US"/>
-              <a:t>Fourth level</a:t>
-            </a:r>
-          </a:p>
-          <a:p>
-            <a:pPr lvl="4"/>
-            <a:r>
-              <a:rPr lang="en-US"/>
-              <a:t>Fifth level</a:t>
-            </a:r>
-          </a:p>
-        </p:txBody>
-      </p:sp>
-      <p:sp>
-        <p:nvSpPr>
-          <p:cNvPr id="6" name="Footer Placeholder 5"/>
-          <p:cNvSpPr>
-            <a:spLocks noGrp="1"/>
-          </p:cNvSpPr>
-          <p:nvPr>
-            <p:ph type="ftr" sz="quarter" idx="4"/>
-          </p:nvPr>
-        </p:nvSpPr>
-        <p:spPr>
-          <a:xfrm>
-            <a:off x="0" y="8685213"/>
-            <a:ext cx="2971800" cy="458787"/>
-          </a:xfrm>
-          <a:prstGeom prst="rect">
-            <a:avLst/>
-          </a:prstGeom>
-        </p:spPr>
-        <p:txBody>
-          <a:bodyPr vert="horz" lIns="91440" tIns="45720" rIns="91440" bIns="45720" rtlCol="0" anchor="b"/>
-          <a:lstStyle>
-            <a:lvl1pPr algn="l">
-              <a:defRPr sz="1200"/>
-            </a:lvl1pPr>
-          </a:lstStyle>
-          <a:p>
-            <a:endParaRPr lang="en-US"/>
-          </a:p>
-        </p:txBody>
-      </p:sp>
-      <p:sp>
-        <p:nvSpPr>
-          <p:cNvPr id="7" name="Slide Number Placeholder 6"/>
-          <p:cNvSpPr>
-            <a:spLocks noGrp="1"/>
-          </p:cNvSpPr>
-          <p:nvPr>
-            <p:ph type="sldNum" sz="quarter" idx="5"/>
-          </p:nvPr>
-        </p:nvSpPr>
-        <p:spPr>
-          <a:xfrm>
-            <a:off x="3884613" y="8685213"/>
-            <a:ext cx="2971800" cy="458787"/>
-          </a:xfrm>
-          <a:prstGeom prst="rect">
-            <a:avLst/>
-          </a:prstGeom>
-        </p:spPr>
-        <p:txBody>
-          <a:bodyPr vert="horz" lIns="91440" tIns="45720" rIns="91440" bIns="45720" rtlCol="0" anchor="b"/>
-          <a:lstStyle>
-            <a:lvl1pPr algn="r">
-              <a:defRPr sz="1200"/>
-            </a:lvl1pPr>
-          </a:lstStyle>
-          <a:p>
-            <a:fld id="{CE5E9CC1-C706-0F49-92D6-E571CC5EEA8F}" type="slidenum">
-              <a:rPr lang="en-US"/>
-              <a:t>‹#›</a:t>
-            </a:fld>
-            <a:endParaRPr lang="en-US"/>
-          </a:p>
-        </p:txBody>
-      </p:sp>
     </p:spTree>
     <p:extLst>
       <p:ext uri="{BB962C8B-B14F-4D97-AF65-F5344CB8AC3E}">
-        <p14:creationId xmlns:p14="http://schemas.microsoft.com/office/powerpoint/2010/main" val="1024086991"/>
+        <p14:creationId xmlns:p14="http://schemas.microsoft.com/office/powerpoint/2010/main" val="2263411733"/>
       </p:ext>
     </p:extLst>
   </p:cSld>
@@ -526,10 +307,6 @@
           <a:bodyPr/>
           <a:lstStyle/>
           <a:p>
-            <a:r>
-              <a:rPr lang="en-US" dirty="0"/>
-              <a:t/>
-            </a:r>
             <a:endParaRPr lang="en-US" dirty="0"/>
           </a:p>
         </p:txBody>
@@ -614,10 +391,6 @@
           <a:bodyPr/>
           <a:lstStyle/>
           <a:p>
-            <a:r>
-              <a:rPr lang="en-US" dirty="0"/>
-              <a:t/>
-            </a:r>
             <a:endParaRPr lang="en-US" dirty="0"/>
           </a:p>
         </p:txBody>
@@ -702,10 +475,6 @@
           <a:bodyPr/>
           <a:lstStyle/>
           <a:p>
-            <a:r>
-              <a:rPr lang="en-US" dirty="0"/>
-              <a:t/>
-            </a:r>
             <a:endParaRPr lang="en-US" dirty="0"/>
           </a:p>
         </p:txBody>
@@ -790,10 +559,6 @@
           <a:bodyPr/>
           <a:lstStyle/>
           <a:p>
-            <a:r>
-              <a:rPr lang="en-US" dirty="0"/>
-              <a:t/>
-            </a:r>
             <a:endParaRPr lang="en-US" dirty="0"/>
           </a:p>
         </p:txBody>
@@ -878,10 +643,6 @@
           <a:bodyPr/>
           <a:lstStyle/>
           <a:p>
-            <a:r>
-              <a:rPr lang="en-US" dirty="0"/>
-              <a:t/>
-            </a:r>
             <a:endParaRPr lang="en-US" dirty="0"/>
           </a:p>
         </p:txBody>
@@ -966,10 +727,6 @@
           <a:bodyPr/>
           <a:lstStyle/>
           <a:p>
-            <a:r>
-              <a:rPr lang="en-US" dirty="0"/>
-              <a:t/>
-            </a:r>
             <a:endParaRPr lang="en-US" dirty="0"/>
           </a:p>
         </p:txBody>
@@ -1054,10 +811,6 @@
           <a:bodyPr/>
           <a:lstStyle/>
           <a:p>
-            <a:r>
-              <a:rPr lang="en-US" dirty="0"/>
-              <a:t/>
-            </a:r>
             <a:endParaRPr lang="en-US" dirty="0"/>
           </a:p>
         </p:txBody>
@@ -1142,10 +895,6 @@
           <a:bodyPr/>
           <a:lstStyle/>
           <a:p>
-            <a:r>
-              <a:rPr lang="en-US" dirty="0"/>
-              <a:t/>
-            </a:r>
             <a:endParaRPr lang="en-US" dirty="0"/>
           </a:p>
         </p:txBody>
@@ -1230,10 +979,6 @@
           <a:bodyPr/>
           <a:lstStyle/>
           <a:p>
-            <a:r>
-              <a:rPr lang="en-US" dirty="0"/>
-              <a:t/>
-            </a:r>
             <a:endParaRPr lang="en-US" dirty="0"/>
           </a:p>
         </p:txBody>
@@ -1318,10 +1063,6 @@
           <a:bodyPr/>
           <a:lstStyle/>
           <a:p>
-            <a:r>
-              <a:rPr lang="en-US" dirty="0"/>
-              <a:t/>
-            </a:r>
             <a:endParaRPr lang="en-US" dirty="0"/>
           </a:p>
         </p:txBody>
@@ -1406,10 +1147,6 @@
           <a:bodyPr/>
           <a:lstStyle/>
           <a:p>
-            <a:r>
-              <a:rPr lang="en-US" dirty="0"/>
-              <a:t/>
-            </a:r>
             <a:endParaRPr lang="en-US" dirty="0"/>
           </a:p>
         </p:txBody>
@@ -1494,10 +1231,6 @@
           <a:bodyPr/>
           <a:lstStyle/>
           <a:p>
-            <a:r>
-              <a:rPr lang="en-US" dirty="0"/>
-              <a:t/>
-            </a:r>
             <a:endParaRPr lang="en-US" dirty="0"/>
           </a:p>
         </p:txBody>
@@ -1582,10 +1315,6 @@
           <a:bodyPr/>
           <a:lstStyle/>
           <a:p>
-            <a:r>
-              <a:rPr lang="en-US" dirty="0"/>
-              <a:t/>
-            </a:r>
             <a:endParaRPr lang="en-US" dirty="0"/>
           </a:p>
         </p:txBody>
@@ -1670,10 +1399,6 @@
           <a:bodyPr/>
           <a:lstStyle/>
           <a:p>
-            <a:r>
-              <a:rPr lang="en-US" dirty="0"/>
-              <a:t/>
-            </a:r>
             <a:endParaRPr lang="en-US" dirty="0"/>
           </a:p>
         </p:txBody>
@@ -1758,10 +1483,6 @@
           <a:bodyPr/>
           <a:lstStyle/>
           <a:p>
-            <a:r>
-              <a:rPr lang="en-US" dirty="0"/>
-              <a:t/>
-            </a:r>
             <a:endParaRPr lang="en-US" dirty="0"/>
           </a:p>
         </p:txBody>
@@ -1846,10 +1567,6 @@
           <a:bodyPr/>
           <a:lstStyle/>
           <a:p>
-            <a:r>
-              <a:rPr lang="en-US" dirty="0"/>
-              <a:t/>
-            </a:r>
             <a:endParaRPr lang="en-US" dirty="0"/>
           </a:p>
         </p:txBody>
@@ -1934,10 +1651,6 @@
           <a:bodyPr/>
           <a:lstStyle/>
           <a:p>
-            <a:r>
-              <a:rPr lang="en-US" dirty="0"/>
-              <a:t/>
-            </a:r>
             <a:endParaRPr lang="en-US" dirty="0"/>
           </a:p>
         </p:txBody>
@@ -2022,10 +1735,6 @@
           <a:bodyPr/>
           <a:lstStyle/>
           <a:p>
-            <a:r>
-              <a:rPr lang="en-US" dirty="0"/>
-              <a:t/>
-            </a:r>
             <a:endParaRPr lang="en-US" dirty="0"/>
           </a:p>
         </p:txBody>
@@ -2110,10 +1819,6 @@
           <a:bodyPr/>
           <a:lstStyle/>
           <a:p>
-            <a:r>
-              <a:rPr lang="en-US" dirty="0"/>
-              <a:t/>
-            </a:r>
             <a:endParaRPr lang="en-US" dirty="0"/>
           </a:p>
         </p:txBody>
@@ -2198,10 +1903,6 @@
           <a:bodyPr/>
           <a:lstStyle/>
           <a:p>
-            <a:r>
-              <a:rPr lang="en-US" dirty="0"/>
-              <a:t/>
-            </a:r>
             <a:endParaRPr lang="en-US" dirty="0"/>
           </a:p>
         </p:txBody>
@@ -2286,10 +1987,6 @@
           <a:bodyPr/>
           <a:lstStyle/>
           <a:p>
-            <a:r>
-              <a:rPr lang="en-US" dirty="0"/>
-              <a:t/>
-            </a:r>
             <a:endParaRPr lang="en-US" dirty="0"/>
           </a:p>
         </p:txBody>
@@ -2374,10 +2071,6 @@
           <a:bodyPr/>
           <a:lstStyle/>
           <a:p>
-            <a:r>
-              <a:rPr lang="en-US" dirty="0"/>
-              <a:t/>
-            </a:r>
             <a:endParaRPr lang="en-US" dirty="0"/>
           </a:p>
         </p:txBody>
@@ -2462,10 +2155,6 @@
           <a:bodyPr/>
           <a:lstStyle/>
           <a:p>
-            <a:r>
-              <a:rPr lang="en-US" dirty="0"/>
-              <a:t/>
-            </a:r>
             <a:endParaRPr lang="en-US" dirty="0"/>
           </a:p>
         </p:txBody>
@@ -2550,10 +2239,6 @@
           <a:bodyPr/>
           <a:lstStyle/>
           <a:p>
-            <a:r>
-              <a:rPr lang="en-US" dirty="0"/>
-              <a:t/>
-            </a:r>
             <a:endParaRPr lang="en-US" dirty="0"/>
           </a:p>
         </p:txBody>
@@ -2638,10 +2323,6 @@
           <a:bodyPr/>
           <a:lstStyle/>
           <a:p>
-            <a:r>
-              <a:rPr lang="en-US" dirty="0"/>
-              <a:t/>
-            </a:r>
             <a:endParaRPr lang="en-US" dirty="0"/>
           </a:p>
         </p:txBody>
@@ -2726,10 +2407,6 @@
           <a:bodyPr/>
           <a:lstStyle/>
           <a:p>
-            <a:r>
-              <a:rPr lang="en-US" dirty="0"/>
-              <a:t/>
-            </a:r>
             <a:endParaRPr lang="en-US" dirty="0"/>
           </a:p>
         </p:txBody>
@@ -2814,10 +2491,6 @@
           <a:bodyPr/>
           <a:lstStyle/>
           <a:p>
-            <a:r>
-              <a:rPr lang="en-US" dirty="0"/>
-              <a:t/>
-            </a:r>
             <a:endParaRPr lang="en-US" dirty="0"/>
           </a:p>
         </p:txBody>
@@ -2891,6 +2564,11 @@
 <file path=ppt/slideMasters/slideMaster1.xml><?xml version="1.0" encoding="utf-8"?>
 <p:sldMaster xmlns:a="http://schemas.openxmlformats.org/drawingml/2006/main" xmlns:r="http://schemas.openxmlformats.org/officeDocument/2006/relationships" xmlns:p="http://schemas.openxmlformats.org/presentationml/2006/main">
   <p:cSld>
+    <p:bg>
+      <p:bgRef idx="1001">
+        <a:schemeClr val="bg1"/>
+      </p:bgRef>
+    </p:bg>
     <p:spTree>
       <p:nvGrpSpPr>
         <p:cNvPr id="1" name=""/>
@@ -3173,6 +2851,7 @@
         <a:solidFill>
           <a:srgbClr val="0284C7"/>
         </a:solidFill>
+        <a:effectLst/>
       </p:bgPr>
     </p:bg>
     <p:spTree>
@@ -3210,7 +2889,7 @@
           <a:bodyPr wrap="square" lIns="0" tIns="0" rIns="0" bIns="0" rtlCol="0" anchor="t"/>
           <a:lstStyle/>
           <a:p>
-            <a:pPr algn="ctr" indent="0" marL="0">
+            <a:pPr marL="0" indent="0" algn="ctr">
               <a:lnSpc>
                 <a:spcPts val="5400"/>
               </a:lnSpc>
@@ -3252,7 +2931,7 @@
           <a:bodyPr wrap="square" lIns="0" tIns="0" rIns="0" bIns="0" rtlCol="0" anchor="t"/>
           <a:lstStyle/>
           <a:p>
-            <a:pPr algn="ctr" indent="0" marL="0">
+            <a:pPr marL="0" indent="0" algn="ctr">
               <a:lnSpc>
                 <a:spcPts val="2520"/>
               </a:lnSpc>
@@ -3294,7 +2973,7 @@
           <a:bodyPr wrap="square" lIns="0" tIns="0" rIns="0" bIns="0" rtlCol="0" anchor="t"/>
           <a:lstStyle/>
           <a:p>
-            <a:pPr algn="ctr" indent="0" marL="0">
+            <a:pPr marL="0" indent="0" algn="ctr">
               <a:lnSpc>
                 <a:spcPts val="2100"/>
               </a:lnSpc>
@@ -3323,8 +3002,8 @@
         </p:nvSpPr>
         <p:spPr>
           <a:xfrm>
-            <a:off x="3110224" y="3724275"/>
-            <a:ext cx="2923421" cy="186664"/>
+            <a:off x="3110224" y="3724274"/>
+            <a:ext cx="2923421" cy="749251"/>
           </a:xfrm>
           <a:prstGeom prst="rect">
             <a:avLst/>
@@ -3336,7 +3015,7 @@
           <a:bodyPr wrap="square" lIns="0" tIns="0" rIns="0" bIns="0" rtlCol="0" anchor="t"/>
           <a:lstStyle/>
           <a:p>
-            <a:pPr algn="ctr" indent="0" marL="0">
+            <a:pPr marL="0" indent="0" algn="ctr">
               <a:lnSpc>
                 <a:spcPts val="1470"/>
               </a:lnSpc>
@@ -3351,8 +3030,75 @@
                 <a:ea typeface="Arial" pitchFamily="34" charset="-122"/>
                 <a:cs typeface="Arial" pitchFamily="34" charset="-120"/>
               </a:rPr>
-              <a:t>Haroon Khan • Deep Learning Lab • March 2026</a:t>
-            </a:r>
+              <a:t>Lab 3 : Deep Learning</a:t>
+            </a:r>
+          </a:p>
+          <a:p>
+            <a:pPr marL="0" indent="0" algn="ctr">
+              <a:lnSpc>
+                <a:spcPts val="1470"/>
+              </a:lnSpc>
+              <a:buNone/>
+            </a:pPr>
+            <a:r>
+              <a:rPr lang="en-US" sz="1050" dirty="0">
+                <a:solidFill>
+                  <a:srgbClr val="FFFFFF"/>
+                </a:solidFill>
+                <a:latin typeface="Arial" pitchFamily="34" charset="0"/>
+                <a:ea typeface="Arial" pitchFamily="34" charset="-122"/>
+                <a:cs typeface="Arial" pitchFamily="34" charset="-120"/>
+              </a:rPr>
+              <a:t>Author : M Haroon Abbas</a:t>
+            </a:r>
+          </a:p>
+          <a:p>
+            <a:pPr marL="0" indent="0" algn="ctr">
+              <a:lnSpc>
+                <a:spcPts val="1470"/>
+              </a:lnSpc>
+              <a:buNone/>
+            </a:pPr>
+            <a:r>
+              <a:rPr lang="en-US" sz="1050" dirty="0">
+                <a:solidFill>
+                  <a:srgbClr val="FFFFFF"/>
+                </a:solidFill>
+                <a:latin typeface="Arial" pitchFamily="34" charset="0"/>
+                <a:ea typeface="Arial" pitchFamily="34" charset="-122"/>
+                <a:cs typeface="Arial" pitchFamily="34" charset="-120"/>
+              </a:rPr>
+              <a:t>Course : Artificial Intelligence</a:t>
+            </a:r>
+          </a:p>
+          <a:p>
+            <a:pPr marL="0" indent="0" algn="ctr">
+              <a:lnSpc>
+                <a:spcPts val="1470"/>
+              </a:lnSpc>
+              <a:buNone/>
+            </a:pPr>
+            <a:r>
+              <a:rPr lang="en-US" sz="1050" dirty="0">
+                <a:solidFill>
+                  <a:srgbClr val="FFFFFF"/>
+                </a:solidFill>
+                <a:latin typeface="Arial" pitchFamily="34" charset="0"/>
+                <a:ea typeface="Arial" pitchFamily="34" charset="-122"/>
+                <a:cs typeface="Arial" pitchFamily="34" charset="-120"/>
+              </a:rPr>
+              <a:t>Course Instructor : Dr Fauzia Talpur</a:t>
+            </a:r>
+            <a:br>
+              <a:rPr lang="en-US" sz="1050" dirty="0">
+                <a:solidFill>
+                  <a:srgbClr val="FFFFFF"/>
+                </a:solidFill>
+                <a:latin typeface="Arial" pitchFamily="34" charset="0"/>
+                <a:ea typeface="Arial" pitchFamily="34" charset="-122"/>
+                <a:cs typeface="Arial" pitchFamily="34" charset="-120"/>
+              </a:rPr>
+            </a:br>
             <a:endParaRPr lang="en-US" sz="1050" dirty="0"/>
           </a:p>
         </p:txBody>
@@ -3373,6 +3119,7 @@
         <a:solidFill>
           <a:srgbClr val="FFFFFF"/>
         </a:solidFill>
+        <a:effectLst/>
       </p:bgPr>
     </p:bg>
     <p:spTree>
@@ -3410,7 +3157,7 @@
           <a:bodyPr wrap="square" lIns="0" tIns="0" rIns="0" bIns="0" rtlCol="0" anchor="t"/>
           <a:lstStyle/>
           <a:p>
-            <a:pPr indent="0" marL="0">
+            <a:pPr marL="0" indent="0">
               <a:lnSpc>
                 <a:spcPts val="3240"/>
               </a:lnSpc>
@@ -3553,6 +3300,7 @@
         <a:solidFill>
           <a:srgbClr val="FFFFFF"/>
         </a:solidFill>
+        <a:effectLst/>
       </p:bgPr>
     </p:bg>
     <p:spTree>
@@ -3594,7 +3342,7 @@
           </a:bodyPr>
           <a:lstStyle/>
           <a:p>
-            <a:pPr indent="0" marL="0">
+            <a:pPr marL="0" indent="0">
               <a:buNone/>
             </a:pPr>
             <a:endParaRPr lang="en-US" dirty="0"/>
@@ -3626,7 +3374,7 @@
           </a:bodyPr>
           <a:lstStyle/>
           <a:p>
-            <a:pPr indent="0" marL="0">
+            <a:pPr marL="0" indent="0">
               <a:buNone/>
             </a:pPr>
             <a:endParaRPr lang="en-US" dirty="0"/>
@@ -3654,7 +3402,7 @@
           <a:bodyPr wrap="square" lIns="0" tIns="0" rIns="0" bIns="0" rtlCol="0" anchor="t"/>
           <a:lstStyle/>
           <a:p>
-            <a:pPr indent="0" marL="0">
+            <a:pPr marL="0" indent="0">
               <a:lnSpc>
                 <a:spcPts val="3240"/>
               </a:lnSpc>
@@ -3696,7 +3444,7 @@
           <a:bodyPr wrap="square" lIns="0" tIns="0" rIns="0" bIns="0" rtlCol="0" anchor="t"/>
           <a:lstStyle/>
           <a:p>
-            <a:pPr indent="0" marL="0">
+            <a:pPr marL="0" indent="0">
               <a:lnSpc>
                 <a:spcPts val="2520"/>
               </a:lnSpc>
@@ -3738,7 +3486,7 @@
           <a:bodyPr wrap="square" lIns="0" tIns="0" rIns="0" bIns="0" rtlCol="0" anchor="t"/>
           <a:lstStyle/>
           <a:p>
-            <a:pPr indent="0" marL="0">
+            <a:pPr marL="0" indent="0">
               <a:lnSpc>
                 <a:spcPts val="1680"/>
               </a:lnSpc>
@@ -3780,7 +3528,7 @@
           <a:bodyPr wrap="square" lIns="0" tIns="0" rIns="0" bIns="0" rtlCol="0" anchor="t"/>
           <a:lstStyle/>
           <a:p>
-            <a:pPr indent="0" marL="0">
+            <a:pPr marL="0" indent="0">
               <a:lnSpc>
                 <a:spcPts val="2520"/>
               </a:lnSpc>
@@ -3822,7 +3570,7 @@
           <a:bodyPr wrap="square" lIns="0" tIns="0" rIns="0" bIns="0" rtlCol="0" anchor="t"/>
           <a:lstStyle/>
           <a:p>
-            <a:pPr indent="0" marL="0">
+            <a:pPr marL="0" indent="0">
               <a:lnSpc>
                 <a:spcPts val="1680"/>
               </a:lnSpc>
@@ -3859,6 +3607,7 @@
         <a:solidFill>
           <a:srgbClr val="FFFFFF"/>
         </a:solidFill>
+        <a:effectLst/>
       </p:bgPr>
     </p:bg>
     <p:spTree>
@@ -3896,7 +3645,7 @@
           <a:bodyPr wrap="square" lIns="0" tIns="0" rIns="0" bIns="0" rtlCol="0" anchor="t"/>
           <a:lstStyle/>
           <a:p>
-            <a:pPr indent="0" marL="0">
+            <a:pPr marL="0" indent="0">
               <a:lnSpc>
                 <a:spcPts val="3240"/>
               </a:lnSpc>
@@ -4039,6 +3788,7 @@
         <a:solidFill>
           <a:srgbClr val="FFFFFF"/>
         </a:solidFill>
+        <a:effectLst/>
       </p:bgPr>
     </p:bg>
     <p:spTree>
@@ -4076,7 +3826,7 @@
           <a:bodyPr wrap="square" lIns="0" tIns="0" rIns="0" bIns="0" rtlCol="0" anchor="t"/>
           <a:lstStyle/>
           <a:p>
-            <a:pPr indent="0" marL="0">
+            <a:pPr marL="0" indent="0">
               <a:lnSpc>
                 <a:spcPts val="3240"/>
               </a:lnSpc>
@@ -4198,6 +3948,7 @@
         <a:solidFill>
           <a:srgbClr val="FFFFFF"/>
         </a:solidFill>
+        <a:effectLst/>
       </p:bgPr>
     </p:bg>
     <p:spTree>
@@ -4235,7 +3986,7 @@
           <a:bodyPr wrap="square" lIns="0" tIns="0" rIns="0" bIns="0" rtlCol="0" anchor="t"/>
           <a:lstStyle/>
           <a:p>
-            <a:pPr indent="0" marL="0">
+            <a:pPr marL="0" indent="0">
               <a:lnSpc>
                 <a:spcPts val="3240"/>
               </a:lnSpc>
@@ -4378,6 +4129,7 @@
         <a:solidFill>
           <a:srgbClr val="FFFFFF"/>
         </a:solidFill>
+        <a:effectLst/>
       </p:bgPr>
     </p:bg>
     <p:spTree>
@@ -4419,7 +4171,7 @@
           </a:bodyPr>
           <a:lstStyle/>
           <a:p>
-            <a:pPr indent="0" marL="0">
+            <a:pPr marL="0" indent="0">
               <a:buNone/>
             </a:pPr>
             <a:endParaRPr lang="en-US" dirty="0"/>
@@ -4451,7 +4203,7 @@
           </a:bodyPr>
           <a:lstStyle/>
           <a:p>
-            <a:pPr indent="0" marL="0">
+            <a:pPr marL="0" indent="0">
               <a:buNone/>
             </a:pPr>
             <a:endParaRPr lang="en-US" dirty="0"/>
@@ -4483,7 +4235,7 @@
           </a:bodyPr>
           <a:lstStyle/>
           <a:p>
-            <a:pPr indent="0" marL="0">
+            <a:pPr marL="0" indent="0">
               <a:buNone/>
             </a:pPr>
             <a:endParaRPr lang="en-US" dirty="0"/>
@@ -4511,7 +4263,7 @@
           <a:bodyPr wrap="square" lIns="0" tIns="0" rIns="0" bIns="0" rtlCol="0" anchor="t"/>
           <a:lstStyle/>
           <a:p>
-            <a:pPr indent="0" marL="0">
+            <a:pPr marL="0" indent="0">
               <a:lnSpc>
                 <a:spcPts val="3240"/>
               </a:lnSpc>
@@ -4553,7 +4305,7 @@
           <a:bodyPr wrap="square" lIns="0" tIns="0" rIns="0" bIns="0" rtlCol="0" anchor="t"/>
           <a:lstStyle/>
           <a:p>
-            <a:pPr indent="0" marL="0">
+            <a:pPr marL="0" indent="0">
               <a:lnSpc>
                 <a:spcPts val="2520"/>
               </a:lnSpc>
@@ -4595,7 +4347,7 @@
           <a:bodyPr wrap="square" lIns="0" tIns="0" rIns="0" bIns="0" rtlCol="0" anchor="t"/>
           <a:lstStyle/>
           <a:p>
-            <a:pPr indent="0" marL="0">
+            <a:pPr marL="0" indent="0">
               <a:lnSpc>
                 <a:spcPts val="1680"/>
               </a:lnSpc>
@@ -4637,7 +4389,7 @@
           <a:bodyPr wrap="square" lIns="0" tIns="0" rIns="0" bIns="0" rtlCol="0" anchor="t"/>
           <a:lstStyle/>
           <a:p>
-            <a:pPr indent="0" marL="0">
+            <a:pPr marL="0" indent="0">
               <a:lnSpc>
                 <a:spcPts val="2520"/>
               </a:lnSpc>
@@ -4679,7 +4431,7 @@
           <a:bodyPr wrap="square" lIns="0" tIns="0" rIns="0" bIns="0" rtlCol="0" anchor="t"/>
           <a:lstStyle/>
           <a:p>
-            <a:pPr indent="0" marL="0">
+            <a:pPr marL="0" indent="0">
               <a:lnSpc>
                 <a:spcPts val="1680"/>
               </a:lnSpc>
@@ -4721,7 +4473,7 @@
           <a:bodyPr wrap="square" lIns="0" tIns="0" rIns="0" bIns="0" rtlCol="0" anchor="t"/>
           <a:lstStyle/>
           <a:p>
-            <a:pPr indent="0" marL="0">
+            <a:pPr marL="0" indent="0">
               <a:lnSpc>
                 <a:spcPts val="2520"/>
               </a:lnSpc>
@@ -4763,7 +4515,7 @@
           <a:bodyPr wrap="square" lIns="0" tIns="0" rIns="0" bIns="0" rtlCol="0" anchor="t"/>
           <a:lstStyle/>
           <a:p>
-            <a:pPr indent="0" marL="0">
+            <a:pPr marL="0" indent="0">
               <a:lnSpc>
                 <a:spcPts val="1680"/>
               </a:lnSpc>
@@ -4800,6 +4552,7 @@
         <a:solidFill>
           <a:srgbClr val="FFFFFF"/>
         </a:solidFill>
+        <a:effectLst/>
       </p:bgPr>
     </p:bg>
     <p:spTree>
@@ -4837,7 +4590,7 @@
           <a:bodyPr wrap="square" lIns="0" tIns="0" rIns="0" bIns="0" rtlCol="0" anchor="t"/>
           <a:lstStyle/>
           <a:p>
-            <a:pPr indent="0" marL="0">
+            <a:pPr marL="0" indent="0">
               <a:lnSpc>
                 <a:spcPts val="3240"/>
               </a:lnSpc>
@@ -4980,6 +4733,7 @@
         <a:solidFill>
           <a:srgbClr val="FFFFFF"/>
         </a:solidFill>
+        <a:effectLst/>
       </p:bgPr>
     </p:bg>
     <p:spTree>
@@ -5017,7 +4771,7 @@
           <a:bodyPr wrap="square" lIns="0" tIns="0" rIns="0" bIns="0" rtlCol="0" anchor="t"/>
           <a:lstStyle/>
           <a:p>
-            <a:pPr indent="0" marL="0">
+            <a:pPr marL="0" indent="0">
               <a:lnSpc>
                 <a:spcPts val="3240"/>
               </a:lnSpc>
@@ -5139,6 +4893,7 @@
         <a:solidFill>
           <a:srgbClr val="FFFFFF"/>
         </a:solidFill>
+        <a:effectLst/>
       </p:bgPr>
     </p:bg>
     <p:spTree>
@@ -5176,7 +4931,7 @@
           <a:bodyPr wrap="square" lIns="0" tIns="0" rIns="0" bIns="0" rtlCol="0" anchor="t"/>
           <a:lstStyle/>
           <a:p>
-            <a:pPr indent="0" marL="0">
+            <a:pPr marL="0" indent="0">
               <a:lnSpc>
                 <a:spcPts val="3240"/>
               </a:lnSpc>
@@ -5319,6 +5074,7 @@
         <a:solidFill>
           <a:srgbClr val="FFFFFF"/>
         </a:solidFill>
+        <a:effectLst/>
       </p:bgPr>
     </p:bg>
     <p:spTree>
@@ -5356,7 +5112,7 @@
           <a:bodyPr wrap="square" lIns="0" tIns="0" rIns="0" bIns="0" rtlCol="0" anchor="t"/>
           <a:lstStyle/>
           <a:p>
-            <a:pPr indent="0" marL="0">
+            <a:pPr marL="0" indent="0">
               <a:lnSpc>
                 <a:spcPts val="3240"/>
               </a:lnSpc>
@@ -5499,6 +5255,7 @@
         <a:solidFill>
           <a:srgbClr val="FFFFFF"/>
         </a:solidFill>
+        <a:effectLst/>
       </p:bgPr>
     </p:bg>
     <p:spTree>
@@ -5536,7 +5293,7 @@
           <a:bodyPr wrap="square" lIns="0" tIns="0" rIns="0" bIns="0" rtlCol="0" anchor="t"/>
           <a:lstStyle/>
           <a:p>
-            <a:pPr indent="0" marL="0">
+            <a:pPr marL="0" indent="0">
               <a:lnSpc>
                 <a:spcPts val="3240"/>
               </a:lnSpc>
@@ -5679,6 +5436,7 @@
         <a:solidFill>
           <a:srgbClr val="FFFFFF"/>
         </a:solidFill>
+        <a:effectLst/>
       </p:bgPr>
     </p:bg>
     <p:spTree>
@@ -5716,7 +5474,7 @@
           <a:bodyPr wrap="square" lIns="0" tIns="0" rIns="0" bIns="0" rtlCol="0" anchor="t"/>
           <a:lstStyle/>
           <a:p>
-            <a:pPr indent="0" marL="0">
+            <a:pPr marL="0" indent="0">
               <a:lnSpc>
                 <a:spcPts val="3240"/>
               </a:lnSpc>
@@ -5859,6 +5617,7 @@
         <a:solidFill>
           <a:srgbClr val="FFFFFF"/>
         </a:solidFill>
+        <a:effectLst/>
       </p:bgPr>
     </p:bg>
     <p:spTree>
@@ -5896,7 +5655,7 @@
           <a:bodyPr wrap="square" lIns="0" tIns="0" rIns="0" bIns="0" rtlCol="0" anchor="t"/>
           <a:lstStyle/>
           <a:p>
-            <a:pPr indent="0" marL="0">
+            <a:pPr marL="0" indent="0">
               <a:lnSpc>
                 <a:spcPts val="3240"/>
               </a:lnSpc>
@@ -6039,6 +5798,7 @@
         <a:solidFill>
           <a:srgbClr val="FFFFFF"/>
         </a:solidFill>
+        <a:effectLst/>
       </p:bgPr>
     </p:bg>
     <p:spTree>
@@ -6080,7 +5840,7 @@
           </a:bodyPr>
           <a:lstStyle/>
           <a:p>
-            <a:pPr indent="0" marL="0">
+            <a:pPr marL="0" indent="0">
               <a:buNone/>
             </a:pPr>
             <a:endParaRPr lang="en-US" dirty="0"/>
@@ -6112,7 +5872,7 @@
           </a:bodyPr>
           <a:lstStyle/>
           <a:p>
-            <a:pPr indent="0" marL="0">
+            <a:pPr marL="0" indent="0">
               <a:buNone/>
             </a:pPr>
             <a:endParaRPr lang="en-US" dirty="0"/>
@@ -6140,7 +5900,7 @@
           <a:bodyPr wrap="square" lIns="0" tIns="0" rIns="0" bIns="0" rtlCol="0" anchor="t"/>
           <a:lstStyle/>
           <a:p>
-            <a:pPr indent="0" marL="0">
+            <a:pPr marL="0" indent="0">
               <a:lnSpc>
                 <a:spcPts val="3240"/>
               </a:lnSpc>
@@ -6182,7 +5942,7 @@
           <a:bodyPr wrap="square" lIns="0" tIns="0" rIns="0" bIns="0" rtlCol="0" anchor="t"/>
           <a:lstStyle/>
           <a:p>
-            <a:pPr indent="0" marL="0">
+            <a:pPr marL="0" indent="0">
               <a:lnSpc>
                 <a:spcPts val="2520"/>
               </a:lnSpc>
@@ -6224,7 +5984,7 @@
           <a:bodyPr wrap="square" lIns="0" tIns="0" rIns="0" bIns="0" rtlCol="0" anchor="t"/>
           <a:lstStyle/>
           <a:p>
-            <a:pPr indent="0" marL="0">
+            <a:pPr marL="0" indent="0">
               <a:lnSpc>
                 <a:spcPts val="1680"/>
               </a:lnSpc>
@@ -6266,7 +6026,7 @@
           <a:bodyPr wrap="square" lIns="0" tIns="0" rIns="0" bIns="0" rtlCol="0" anchor="t"/>
           <a:lstStyle/>
           <a:p>
-            <a:pPr indent="0" marL="0">
+            <a:pPr marL="0" indent="0">
               <a:lnSpc>
                 <a:spcPts val="2520"/>
               </a:lnSpc>
@@ -6308,7 +6068,7 @@
           <a:bodyPr wrap="square" lIns="0" tIns="0" rIns="0" bIns="0" rtlCol="0" anchor="t"/>
           <a:lstStyle/>
           <a:p>
-            <a:pPr indent="0" marL="0">
+            <a:pPr marL="0" indent="0">
               <a:lnSpc>
                 <a:spcPts val="1680"/>
               </a:lnSpc>
@@ -6345,6 +6105,7 @@
         <a:solidFill>
           <a:srgbClr val="FFFFFF"/>
         </a:solidFill>
+        <a:effectLst/>
       </p:bgPr>
     </p:bg>
     <p:spTree>
@@ -6382,7 +6143,7 @@
           <a:bodyPr wrap="square" lIns="0" tIns="0" rIns="0" bIns="0" rtlCol="0" anchor="t"/>
           <a:lstStyle/>
           <a:p>
-            <a:pPr indent="0" marL="0">
+            <a:pPr marL="0" indent="0">
               <a:lnSpc>
                 <a:spcPts val="3240"/>
               </a:lnSpc>
@@ -6525,6 +6286,7 @@
         <a:solidFill>
           <a:srgbClr val="FFFFFF"/>
         </a:solidFill>
+        <a:effectLst/>
       </p:bgPr>
     </p:bg>
     <p:spTree>
@@ -6562,7 +6324,7 @@
           <a:bodyPr wrap="square" lIns="0" tIns="0" rIns="0" bIns="0" rtlCol="0" anchor="t"/>
           <a:lstStyle/>
           <a:p>
-            <a:pPr indent="0" marL="0">
+            <a:pPr marL="0" indent="0">
               <a:lnSpc>
                 <a:spcPts val="3240"/>
               </a:lnSpc>
@@ -6705,6 +6467,7 @@
         <a:solidFill>
           <a:srgbClr val="FFFFFF"/>
         </a:solidFill>
+        <a:effectLst/>
       </p:bgPr>
     </p:bg>
     <p:spTree>
@@ -6742,7 +6505,7 @@
           <a:bodyPr wrap="square" lIns="0" tIns="0" rIns="0" bIns="0" rtlCol="0" anchor="t"/>
           <a:lstStyle/>
           <a:p>
-            <a:pPr indent="0" marL="0">
+            <a:pPr marL="0" indent="0">
               <a:lnSpc>
                 <a:spcPts val="3240"/>
               </a:lnSpc>
@@ -6885,6 +6648,7 @@
         <a:solidFill>
           <a:srgbClr val="FFFFFF"/>
         </a:solidFill>
+        <a:effectLst/>
       </p:bgPr>
     </p:bg>
     <p:spTree>
@@ -6922,7 +6686,7 @@
           <a:bodyPr wrap="square" lIns="0" tIns="0" rIns="0" bIns="0" rtlCol="0" anchor="t"/>
           <a:lstStyle/>
           <a:p>
-            <a:pPr indent="0" marL="0">
+            <a:pPr marL="0" indent="0">
               <a:lnSpc>
                 <a:spcPts val="3240"/>
               </a:lnSpc>
@@ -6964,7 +6728,7 @@
           <a:bodyPr wrap="square" lIns="0" tIns="0" rIns="0" bIns="0" rtlCol="0" anchor="t"/>
           <a:lstStyle/>
           <a:p>
-            <a:pPr indent="0" marL="0">
+            <a:pPr marL="0" indent="0">
               <a:lnSpc>
                 <a:spcPts val="2400"/>
               </a:lnSpc>
@@ -7001,6 +6765,7 @@
         <a:solidFill>
           <a:srgbClr val="0284C7"/>
         </a:solidFill>
+        <a:effectLst/>
       </p:bgPr>
     </p:bg>
     <p:spTree>
@@ -7038,7 +6803,7 @@
           <a:bodyPr wrap="square" lIns="0" tIns="0" rIns="0" bIns="0" rtlCol="0" anchor="t"/>
           <a:lstStyle/>
           <a:p>
-            <a:pPr algn="ctr" indent="0" marL="0">
+            <a:pPr marL="0" indent="0" algn="ctr">
               <a:lnSpc>
                 <a:spcPts val="4320"/>
               </a:lnSpc>
@@ -7080,7 +6845,7 @@
           <a:bodyPr wrap="square" lIns="0" tIns="0" rIns="0" bIns="0" rtlCol="0" anchor="t"/>
           <a:lstStyle/>
           <a:p>
-            <a:pPr algn="ctr" indent="0" marL="0">
+            <a:pPr marL="0" indent="0" algn="ctr">
               <a:lnSpc>
                 <a:spcPts val="2100"/>
               </a:lnSpc>
@@ -7122,7 +6887,7 @@
           <a:bodyPr wrap="square" lIns="0" tIns="0" rIns="0" bIns="0" rtlCol="0" anchor="t"/>
           <a:lstStyle/>
           <a:p>
-            <a:pPr algn="ctr" indent="0" marL="0">
+            <a:pPr marL="0" indent="0" algn="ctr">
               <a:lnSpc>
                 <a:spcPts val="1470"/>
               </a:lnSpc>
@@ -7137,7 +6902,73 @@
                 <a:ea typeface="Arial" pitchFamily="34" charset="-122"/>
                 <a:cs typeface="Arial" pitchFamily="34" charset="-120"/>
               </a:rPr>
-              <a:t>Project Repository: github.com/haroon/chest-xray-classifier</a:t>
+              <a:t>Project Repository: github.com/</a:t>
+            </a:r>
+            <a:r>
+              <a:rPr lang="en-US" sz="1050" dirty="0" err="1">
+                <a:solidFill>
+                  <a:srgbClr val="FFFFFF"/>
+                </a:solidFill>
+                <a:latin typeface="Arial" pitchFamily="34" charset="0"/>
+                <a:ea typeface="Arial" pitchFamily="34" charset="-122"/>
+                <a:cs typeface="Arial" pitchFamily="34" charset="-120"/>
+              </a:rPr>
+              <a:t>RealHaroon</a:t>
+            </a:r>
+            <a:r>
+              <a:rPr lang="en-US" sz="1050" dirty="0">
+                <a:solidFill>
+                  <a:srgbClr val="FFFFFF"/>
+                </a:solidFill>
+                <a:latin typeface="Arial" pitchFamily="34" charset="0"/>
+                <a:ea typeface="Arial" pitchFamily="34" charset="-122"/>
+                <a:cs typeface="Arial" pitchFamily="34" charset="-120"/>
+              </a:rPr>
+              <a:t>/</a:t>
+            </a:r>
+            <a:r>
+              <a:rPr lang="en-US" sz="1050" dirty="0" err="1">
+                <a:solidFill>
+                  <a:srgbClr val="FFFFFF"/>
+                </a:solidFill>
+                <a:latin typeface="Arial" pitchFamily="34" charset="0"/>
+                <a:ea typeface="Arial" pitchFamily="34" charset="-122"/>
+                <a:cs typeface="Arial" pitchFamily="34" charset="-120"/>
+              </a:rPr>
+              <a:t>Arificial</a:t>
+            </a:r>
+            <a:r>
+              <a:rPr lang="en-US" sz="1050" dirty="0">
+                <a:solidFill>
+                  <a:srgbClr val="FFFFFF"/>
+                </a:solidFill>
+                <a:latin typeface="Arial" pitchFamily="34" charset="0"/>
+                <a:ea typeface="Arial" pitchFamily="34" charset="-122"/>
+                <a:cs typeface="Arial" pitchFamily="34" charset="-120"/>
+              </a:rPr>
+              <a:t>-Intelligence-Labs/</a:t>
+            </a:r>
+            <a:r>
+              <a:rPr lang="en-US" sz="1050" dirty="0" err="1">
+                <a:solidFill>
+                  <a:srgbClr val="FFFFFF"/>
+                </a:solidFill>
+                <a:latin typeface="Arial" pitchFamily="34" charset="0"/>
+                <a:ea typeface="Arial" pitchFamily="34" charset="-122"/>
+                <a:cs typeface="Arial" pitchFamily="34" charset="-120"/>
+              </a:rPr>
+              <a:t>ChestXray</a:t>
+            </a:r>
+            <a:r>
+              <a:rPr lang="en-US" sz="1050" dirty="0">
+                <a:solidFill>
+                  <a:srgbClr val="FFFFFF"/>
+                </a:solidFill>
+                <a:latin typeface="Arial" pitchFamily="34" charset="0"/>
+                <a:ea typeface="Arial" pitchFamily="34" charset="-122"/>
+                <a:cs typeface="Arial" pitchFamily="34" charset="-120"/>
+              </a:rPr>
+              <a:t>-Classification</a:t>
             </a:r>
             <a:endParaRPr lang="en-US" sz="1050" dirty="0"/>
           </a:p>
@@ -7164,23 +6995,12 @@
           <a:bodyPr wrap="square" lIns="0" tIns="0" rIns="0" bIns="0" rtlCol="0" anchor="t"/>
           <a:lstStyle/>
           <a:p>
-            <a:pPr algn="ctr" indent="0" marL="0">
+            <a:pPr marL="0" indent="0" algn="ctr">
               <a:lnSpc>
                 <a:spcPts val="1470"/>
               </a:lnSpc>
               <a:buNone/>
             </a:pPr>
-            <a:r>
-              <a:rPr lang="en-US" sz="1050" dirty="0">
-                <a:solidFill>
-                  <a:srgbClr val="FFFFFF"/>
-                </a:solidFill>
-                <a:latin typeface="Arial" pitchFamily="34" charset="0"/>
-                <a:ea typeface="Arial" pitchFamily="34" charset="-122"/>
-                <a:cs typeface="Arial" pitchFamily="34" charset="-120"/>
-              </a:rPr>
-              <a:t>Contact: haroon.khan@example.com</a:t>
-            </a:r>
             <a:endParaRPr lang="en-US" sz="1050" dirty="0"/>
           </a:p>
         </p:txBody>
@@ -7201,6 +7021,7 @@
         <a:solidFill>
           <a:srgbClr val="FFFFFF"/>
         </a:solidFill>
+        <a:effectLst/>
       </p:bgPr>
     </p:bg>
     <p:spTree>
@@ -7238,7 +7059,7 @@
           <a:bodyPr wrap="square" lIns="0" tIns="0" rIns="0" bIns="0" rtlCol="0" anchor="t"/>
           <a:lstStyle/>
           <a:p>
-            <a:pPr indent="0" marL="0">
+            <a:pPr marL="0" indent="0">
               <a:lnSpc>
                 <a:spcPts val="3240"/>
               </a:lnSpc>
@@ -7381,6 +7202,7 @@
         <a:solidFill>
           <a:srgbClr val="FFFFFF"/>
         </a:solidFill>
+        <a:effectLst/>
       </p:bgPr>
     </p:bg>
     <p:spTree>
@@ -7422,7 +7244,7 @@
           </a:bodyPr>
           <a:lstStyle/>
           <a:p>
-            <a:pPr indent="0" marL="0">
+            <a:pPr marL="0" indent="0">
               <a:buNone/>
             </a:pPr>
             <a:endParaRPr lang="en-US" dirty="0"/>
@@ -7454,7 +7276,7 @@
           </a:bodyPr>
           <a:lstStyle/>
           <a:p>
-            <a:pPr indent="0" marL="0">
+            <a:pPr marL="0" indent="0">
               <a:buNone/>
             </a:pPr>
             <a:endParaRPr lang="en-US" dirty="0"/>
@@ -7482,7 +7304,7 @@
           <a:bodyPr wrap="square" lIns="0" tIns="0" rIns="0" bIns="0" rtlCol="0" anchor="t"/>
           <a:lstStyle/>
           <a:p>
-            <a:pPr indent="0" marL="0">
+            <a:pPr marL="0" indent="0">
               <a:lnSpc>
                 <a:spcPts val="3240"/>
               </a:lnSpc>
@@ -7524,7 +7346,7 @@
           <a:bodyPr wrap="square" lIns="0" tIns="0" rIns="0" bIns="0" rtlCol="0" anchor="t"/>
           <a:lstStyle/>
           <a:p>
-            <a:pPr indent="0" marL="0">
+            <a:pPr marL="0" indent="0">
               <a:lnSpc>
                 <a:spcPts val="2520"/>
               </a:lnSpc>
@@ -7566,7 +7388,7 @@
           <a:bodyPr wrap="square" lIns="0" tIns="0" rIns="0" bIns="0" rtlCol="0" anchor="t"/>
           <a:lstStyle/>
           <a:p>
-            <a:pPr indent="0" marL="0">
+            <a:pPr marL="0" indent="0">
               <a:lnSpc>
                 <a:spcPts val="1680"/>
               </a:lnSpc>
@@ -7608,7 +7430,7 @@
           <a:bodyPr wrap="square" lIns="0" tIns="0" rIns="0" bIns="0" rtlCol="0" anchor="t"/>
           <a:lstStyle/>
           <a:p>
-            <a:pPr indent="0" marL="0">
+            <a:pPr marL="0" indent="0">
               <a:lnSpc>
                 <a:spcPts val="2520"/>
               </a:lnSpc>
@@ -7650,7 +7472,7 @@
           <a:bodyPr wrap="square" lIns="0" tIns="0" rIns="0" bIns="0" rtlCol="0" anchor="t"/>
           <a:lstStyle/>
           <a:p>
-            <a:pPr indent="0" marL="0">
+            <a:pPr marL="0" indent="0">
               <a:lnSpc>
                 <a:spcPts val="1680"/>
               </a:lnSpc>
@@ -7687,6 +7509,7 @@
         <a:solidFill>
           <a:srgbClr val="FFFFFF"/>
         </a:solidFill>
+        <a:effectLst/>
       </p:bgPr>
     </p:bg>
     <p:spTree>
@@ -7724,7 +7547,7 @@
           <a:bodyPr wrap="square" lIns="0" tIns="0" rIns="0" bIns="0" rtlCol="0" anchor="t"/>
           <a:lstStyle/>
           <a:p>
-            <a:pPr indent="0" marL="0">
+            <a:pPr marL="0" indent="0">
               <a:lnSpc>
                 <a:spcPts val="3240"/>
               </a:lnSpc>
@@ -7867,6 +7690,7 @@
         <a:solidFill>
           <a:srgbClr val="FFFFFF"/>
         </a:solidFill>
+        <a:effectLst/>
       </p:bgPr>
     </p:bg>
     <p:spTree>
@@ -7908,7 +7732,7 @@
           </a:bodyPr>
           <a:lstStyle/>
           <a:p>
-            <a:pPr indent="0" marL="0">
+            <a:pPr marL="0" indent="0">
               <a:buNone/>
             </a:pPr>
             <a:endParaRPr lang="en-US" dirty="0"/>
@@ -7940,7 +7764,7 @@
           </a:bodyPr>
           <a:lstStyle/>
           <a:p>
-            <a:pPr indent="0" marL="0">
+            <a:pPr marL="0" indent="0">
               <a:buNone/>
             </a:pPr>
             <a:endParaRPr lang="en-US" dirty="0"/>
@@ -7968,7 +7792,7 @@
           <a:bodyPr wrap="square" lIns="0" tIns="0" rIns="0" bIns="0" rtlCol="0" anchor="t"/>
           <a:lstStyle/>
           <a:p>
-            <a:pPr indent="0" marL="0">
+            <a:pPr marL="0" indent="0">
               <a:lnSpc>
                 <a:spcPts val="3240"/>
               </a:lnSpc>
@@ -8010,7 +7834,7 @@
           <a:bodyPr wrap="square" lIns="0" tIns="0" rIns="0" bIns="0" rtlCol="0" anchor="t"/>
           <a:lstStyle/>
           <a:p>
-            <a:pPr indent="0" marL="0">
+            <a:pPr marL="0" indent="0">
               <a:lnSpc>
                 <a:spcPts val="2520"/>
               </a:lnSpc>
@@ -8052,7 +7876,7 @@
           <a:bodyPr wrap="square" lIns="0" tIns="0" rIns="0" bIns="0" rtlCol="0" anchor="t"/>
           <a:lstStyle/>
           <a:p>
-            <a:pPr indent="0" marL="0">
+            <a:pPr marL="0" indent="0">
               <a:lnSpc>
                 <a:spcPts val="1680"/>
               </a:lnSpc>
@@ -8094,7 +7918,7 @@
           <a:bodyPr wrap="square" lIns="0" tIns="0" rIns="0" bIns="0" rtlCol="0" anchor="t"/>
           <a:lstStyle/>
           <a:p>
-            <a:pPr indent="0" marL="0">
+            <a:pPr marL="0" indent="0">
               <a:lnSpc>
                 <a:spcPts val="2520"/>
               </a:lnSpc>
@@ -8136,7 +7960,7 @@
           <a:bodyPr wrap="square" lIns="0" tIns="0" rIns="0" bIns="0" rtlCol="0" anchor="t"/>
           <a:lstStyle/>
           <a:p>
-            <a:pPr indent="0" marL="0">
+            <a:pPr marL="0" indent="0">
               <a:lnSpc>
                 <a:spcPts val="1680"/>
               </a:lnSpc>
@@ -8173,6 +7997,7 @@
         <a:solidFill>
           <a:srgbClr val="FFFFFF"/>
         </a:solidFill>
+        <a:effectLst/>
       </p:bgPr>
     </p:bg>
     <p:spTree>
@@ -8210,7 +8035,7 @@
           <a:bodyPr wrap="square" lIns="0" tIns="0" rIns="0" bIns="0" rtlCol="0" anchor="t"/>
           <a:lstStyle/>
           <a:p>
-            <a:pPr indent="0" marL="0">
+            <a:pPr marL="0" indent="0">
               <a:lnSpc>
                 <a:spcPts val="3240"/>
               </a:lnSpc>
@@ -8353,6 +8178,7 @@
         <a:solidFill>
           <a:srgbClr val="FFFFFF"/>
         </a:solidFill>
+        <a:effectLst/>
       </p:bgPr>
     </p:bg>
     <p:spTree>
@@ -8390,7 +8216,7 @@
           <a:bodyPr wrap="square" lIns="0" tIns="0" rIns="0" bIns="0" rtlCol="0" anchor="t"/>
           <a:lstStyle/>
           <a:p>
-            <a:pPr indent="0" marL="0">
+            <a:pPr marL="0" indent="0">
               <a:lnSpc>
                 <a:spcPts val="3240"/>
               </a:lnSpc>
@@ -8533,6 +8359,7 @@
         <a:solidFill>
           <a:srgbClr val="FFFFFF"/>
         </a:solidFill>
+        <a:effectLst/>
       </p:bgPr>
     </p:bg>
     <p:spTree>
@@ -8570,7 +8397,7 @@
           <a:bodyPr wrap="square" lIns="0" tIns="0" rIns="0" bIns="0" rtlCol="0" anchor="t"/>
           <a:lstStyle/>
           <a:p>
-            <a:pPr indent="0" marL="0">
+            <a:pPr marL="0" indent="0">
               <a:lnSpc>
                 <a:spcPts val="3240"/>
               </a:lnSpc>
@@ -8977,4 +8804,319 @@
     </a:ext>
   </a:extLst>
 </a:theme>
+</file>
+
+<file path=ppt/theme/theme2.xml><?xml version="1.0" encoding="utf-8"?>
+<a:theme xmlns:a="http://schemas.openxmlformats.org/drawingml/2006/main" name="Office Theme">
+  <a:themeElements>
+    <a:clrScheme name="Office">
+      <a:dk1>
+        <a:sysClr val="windowText" lastClr="000000"/>
+      </a:dk1>
+      <a:lt1>
+        <a:sysClr val="window" lastClr="FFFFFF"/>
+      </a:lt1>
+      <a:dk2>
+        <a:srgbClr val="0E2841"/>
+      </a:dk2>
+      <a:lt2>
+        <a:srgbClr val="E8E8E8"/>
+      </a:lt2>
+      <a:accent1>
+        <a:srgbClr val="156082"/>
+      </a:accent1>
+      <a:accent2>
+        <a:srgbClr val="E97132"/>
+      </a:accent2>
+      <a:accent3>
+        <a:srgbClr val="196B24"/>
+      </a:accent3>
+      <a:accent4>
+        <a:srgbClr val="0F9ED5"/>
+      </a:accent4>
+      <a:accent5>
+        <a:srgbClr val="A02B93"/>
+      </a:accent5>
+      <a:accent6>
+        <a:srgbClr val="4EA72E"/>
+      </a:accent6>
+      <a:hlink>
+        <a:srgbClr val="467886"/>
+      </a:hlink>
+      <a:folHlink>
+        <a:srgbClr val="96607D"/>
+      </a:folHlink>
+    </a:clrScheme>
+    <a:fontScheme name="Office">
+      <a:majorFont>
+        <a:latin typeface="Aptos Display" panose="02110004020202020204"/>
+        <a:ea typeface=""/>
+        <a:cs typeface=""/>
+        <a:font script="Jpan" typeface="游ゴシック Light"/>
+        <a:font script="Hang" typeface="맑은 고딕"/>
+        <a:font script="Hans" typeface="等线 Light"/>
+        <a:font script="Hant" typeface="新細明體"/>
+        <a:font script="Arab" typeface="Times New Roman"/>
+        <a:font script="Hebr" typeface="Times New Roman"/>
+        <a:font script="Thai" typeface="Angsana New"/>
+        <a:font script="Ethi" typeface="Nyala"/>
+        <a:font script="Beng" typeface="Vrinda"/>
+        <a:font script="Gujr" typeface="Shruti"/>
+        <a:font script="Khmr" typeface="MoolBoran"/>
+        <a:font script="Knda" typeface="Tunga"/>
+        <a:font script="Guru" typeface="Raavi"/>
+        <a:font script="Cans" typeface="Euphemia"/>
+        <a:font script="Cher" typeface="Plantagenet Cherokee"/>
+        <a:font script="Yiii" typeface="Microsoft Yi Baiti"/>
+        <a:font script="Tibt" typeface="Microsoft Himalaya"/>
+        <a:font script="Thaa" typeface="MV Boli"/>
+        <a:font script="Deva" typeface="Mangal"/>
+        <a:font script="Telu" typeface="Gautami"/>
+        <a:font script="Taml" typeface="Latha"/>
+        <a:font script="Syrc" typeface="Estrangelo Edessa"/>
+        <a:font script="Orya" typeface="Kalinga"/>
+        <a:font script="Mlym" typeface="Kartika"/>
+        <a:font script="Laoo" typeface="DokChampa"/>
+        <a:font script="Sinh" typeface="Iskoola Pota"/>
+        <a:font script="Mong" typeface="Mongolian Baiti"/>
+        <a:font script="Viet" typeface="Times New Roman"/>
+        <a:font script="Uigh" typeface="Microsoft Uighur"/>
+        <a:font script="Geor" typeface="Sylfaen"/>
+        <a:font script="Armn" typeface="Arial"/>
+        <a:font script="Bugi" typeface="Leelawadee UI"/>
+        <a:font script="Bopo" typeface="Microsoft JhengHei"/>
+        <a:font script="Java" typeface="Javanese Text"/>
+        <a:font script="Lisu" typeface="Segoe UI"/>
+        <a:font script="Mymr" typeface="Myanmar Text"/>
+        <a:font script="Nkoo" typeface="Ebrima"/>
+        <a:font script="Olck" typeface="Nirmala UI"/>
+        <a:font script="Osma" typeface="Ebrima"/>
+        <a:font script="Phag" typeface="Phagspa"/>
+        <a:font script="Syrn" typeface="Estrangelo Edessa"/>
+        <a:font script="Syrj" typeface="Estrangelo Edessa"/>
+        <a:font script="Syre" typeface="Estrangelo Edessa"/>
+        <a:font script="Sora" typeface="Nirmala UI"/>
+        <a:font script="Tale" typeface="Microsoft Tai Le"/>
+        <a:font script="Talu" typeface="Microsoft New Tai Lue"/>
+        <a:font script="Tfng" typeface="Ebrima"/>
+      </a:majorFont>
+      <a:minorFont>
+        <a:latin typeface="Aptos" panose="02110004020202020204"/>
+        <a:ea typeface=""/>
+        <a:cs typeface=""/>
+        <a:font script="Jpan" typeface="游ゴシック"/>
+        <a:font script="Hang" typeface="맑은 고딕"/>
+        <a:font script="Hans" typeface="等线"/>
+        <a:font script="Hant" typeface="新細明體"/>
+        <a:font script="Arab" typeface="Arial"/>
+        <a:font script="Hebr" typeface="Arial"/>
+        <a:font script="Thai" typeface="Cordia New"/>
+        <a:font script="Ethi" typeface="Nyala"/>
+        <a:font script="Beng" typeface="Vrinda"/>
+        <a:font script="Gujr" typeface="Shruti"/>
+        <a:font script="Khmr" typeface="DaunPenh"/>
+        <a:font script="Knda" typeface="Tunga"/>
+        <a:font script="Guru" typeface="Raavi"/>
+        <a:font script="Cans" typeface="Euphemia"/>
+        <a:font script="Cher" typeface="Plantagenet Cherokee"/>
+        <a:font script="Yiii" typeface="Microsoft Yi Baiti"/>
+        <a:font script="Tibt" typeface="Microsoft Himalaya"/>
+        <a:font script="Thaa" typeface="MV Boli"/>
+        <a:font script="Deva" typeface="Mangal"/>
+        <a:font script="Telu" typeface="Gautami"/>
+        <a:font script="Taml" typeface="Latha"/>
+        <a:font script="Syrc" typeface="Estrangelo Edessa"/>
+        <a:font script="Orya" typeface="Kalinga"/>
+        <a:font script="Mlym" typeface="Kartika"/>
+        <a:font script="Laoo" typeface="DokChampa"/>
+        <a:font script="Sinh" typeface="Iskoola Pota"/>
+        <a:font script="Mong" typeface="Mongolian Baiti"/>
+        <a:font script="Viet" typeface="Arial"/>
+        <a:font script="Uigh" typeface="Microsoft Uighur"/>
+        <a:font script="Geor" typeface="Sylfaen"/>
+        <a:font script="Armn" typeface="Arial"/>
+        <a:font script="Bugi" typeface="Leelawadee UI"/>
+        <a:font script="Bopo" typeface="Microsoft JhengHei"/>
+        <a:font script="Java" typeface="Javanese Text"/>
+        <a:font script="Lisu" typeface="Segoe UI"/>
+        <a:font script="Mymr" typeface="Myanmar Text"/>
+        <a:font script="Nkoo" typeface="Ebrima"/>
+        <a:font script="Olck" typeface="Nirmala UI"/>
+        <a:font script="Osma" typeface="Ebrima"/>
+        <a:font script="Phag" typeface="Phagspa"/>
+        <a:font script="Syrn" typeface="Estrangelo Edessa"/>
+        <a:font script="Syrj" typeface="Estrangelo Edessa"/>
+        <a:font script="Syre" typeface="Estrangelo Edessa"/>
+        <a:font script="Sora" typeface="Nirmala UI"/>
+        <a:font script="Tale" typeface="Microsoft Tai Le"/>
+        <a:font script="Talu" typeface="Microsoft New Tai Lue"/>
+        <a:font script="Tfng" typeface="Ebrima"/>
+      </a:minorFont>
+    </a:fontScheme>
+    <a:fmtScheme name="Office">
+      <a:fillStyleLst>
+        <a:solidFill>
+          <a:schemeClr val="phClr"/>
+        </a:solidFill>
+        <a:gradFill rotWithShape="1">
+          <a:gsLst>
+            <a:gs pos="0">
+              <a:schemeClr val="phClr">
+                <a:lumMod val="110000"/>
+                <a:satMod val="105000"/>
+                <a:tint val="67000"/>
+              </a:schemeClr>
+            </a:gs>
+            <a:gs pos="50000">
+              <a:schemeClr val="phClr">
+                <a:lumMod val="105000"/>
+                <a:satMod val="103000"/>
+                <a:tint val="73000"/>
+              </a:schemeClr>
+            </a:gs>
+            <a:gs pos="100000">
+              <a:schemeClr val="phClr">
+                <a:lumMod val="105000"/>
+                <a:satMod val="109000"/>
+                <a:tint val="81000"/>
+              </a:schemeClr>
+            </a:gs>
+          </a:gsLst>
+          <a:lin ang="5400000" scaled="0"/>
+        </a:gradFill>
+        <a:gradFill rotWithShape="1">
+          <a:gsLst>
+            <a:gs pos="0">
+              <a:schemeClr val="phClr">
+                <a:satMod val="103000"/>
+                <a:lumMod val="102000"/>
+                <a:tint val="94000"/>
+              </a:schemeClr>
+            </a:gs>
+            <a:gs pos="50000">
+              <a:schemeClr val="phClr">
+                <a:satMod val="110000"/>
+                <a:lumMod val="100000"/>
+                <a:shade val="100000"/>
+              </a:schemeClr>
+            </a:gs>
+            <a:gs pos="100000">
+              <a:schemeClr val="phClr">
+                <a:lumMod val="99000"/>
+                <a:satMod val="120000"/>
+                <a:shade val="78000"/>
+              </a:schemeClr>
+            </a:gs>
+          </a:gsLst>
+          <a:lin ang="5400000" scaled="0"/>
+        </a:gradFill>
+      </a:fillStyleLst>
+      <a:lnStyleLst>
+        <a:ln w="12700" cap="flat" cmpd="sng" algn="ctr">
+          <a:solidFill>
+            <a:schemeClr val="phClr"/>
+          </a:solidFill>
+          <a:prstDash val="solid"/>
+          <a:miter lim="800000"/>
+        </a:ln>
+        <a:ln w="19050" cap="flat" cmpd="sng" algn="ctr">
+          <a:solidFill>
+            <a:schemeClr val="phClr"/>
+          </a:solidFill>
+          <a:prstDash val="solid"/>
+          <a:miter lim="800000"/>
+        </a:ln>
+        <a:ln w="25400" cap="flat" cmpd="sng" algn="ctr">
+          <a:solidFill>
+            <a:schemeClr val="phClr"/>
+          </a:solidFill>
+          <a:prstDash val="solid"/>
+          <a:miter lim="800000"/>
+        </a:ln>
+      </a:lnStyleLst>
+      <a:effectStyleLst>
+        <a:effectStyle>
+          <a:effectLst/>
+        </a:effectStyle>
+        <a:effectStyle>
+          <a:effectLst/>
+        </a:effectStyle>
+        <a:effectStyle>
+          <a:effectLst>
+            <a:outerShdw blurRad="57150" dist="19050" dir="5400000" algn="ctr" rotWithShape="0">
+              <a:srgbClr val="000000">
+                <a:alpha val="63000"/>
+              </a:srgbClr>
+            </a:outerShdw>
+          </a:effectLst>
+        </a:effectStyle>
+      </a:effectStyleLst>
+      <a:bgFillStyleLst>
+        <a:solidFill>
+          <a:schemeClr val="phClr"/>
+        </a:solidFill>
+        <a:solidFill>
+          <a:schemeClr val="phClr">
+            <a:tint val="95000"/>
+            <a:satMod val="170000"/>
+          </a:schemeClr>
+        </a:solidFill>
+        <a:gradFill rotWithShape="1">
+          <a:gsLst>
+            <a:gs pos="0">
+              <a:schemeClr val="phClr">
+                <a:tint val="93000"/>
+                <a:satMod val="150000"/>
+                <a:shade val="98000"/>
+                <a:lumMod val="102000"/>
+              </a:schemeClr>
+            </a:gs>
+            <a:gs pos="50000">
+              <a:schemeClr val="phClr">
+                <a:tint val="98000"/>
+                <a:satMod val="130000"/>
+                <a:shade val="90000"/>
+                <a:lumMod val="103000"/>
+              </a:schemeClr>
+            </a:gs>
+            <a:gs pos="100000">
+              <a:schemeClr val="phClr">
+                <a:shade val="63000"/>
+                <a:satMod val="120000"/>
+              </a:schemeClr>
+            </a:gs>
+          </a:gsLst>
+          <a:lin ang="5400000" scaled="0"/>
+        </a:gradFill>
+      </a:bgFillStyleLst>
+    </a:fmtScheme>
+  </a:themeElements>
+  <a:objectDefaults>
+    <a:lnDef>
+      <a:spPr/>
+      <a:bodyPr/>
+      <a:lstStyle/>
+      <a:style>
+        <a:lnRef idx="2">
+          <a:schemeClr val="accent1"/>
+        </a:lnRef>
+        <a:fillRef idx="0">
+          <a:schemeClr val="accent1"/>
+        </a:fillRef>
+        <a:effectRef idx="1">
+          <a:schemeClr val="accent1"/>
+        </a:effectRef>
+        <a:fontRef idx="minor">
+          <a:schemeClr val="tx1"/>
+        </a:fontRef>
+      </a:style>
+    </a:lnDef>
+  </a:objectDefaults>
+  <a:extraClrSchemeLst/>
+  <a:extLst>
+    <a:ext uri="{05A4C25C-085E-4340-85A3-A5531E510DB2}">
+      <thm15:themeFamily xmlns:thm15="http://schemas.microsoft.com/office/thememl/2012/main" name="Office Theme" id="{2E142A2C-CD16-42D6-873A-C26D2A0506FA}" vid="{1BDDFF52-6CD6-40A5-AB3C-68EB2F1E4D0A}"/>
+    </a:ext>
+  </a:extLst>
+</a:theme>
 </file>